--- a/classes/parte-6-analisis-de-malware/154-malware-en-linux/clase-154-presentacion.pptx
+++ b/classes/parte-6-analisis-de-malware/154-malware-en-linux/clase-154-presentacion.pptx
@@ -17,6 +17,9 @@
     <p:sldId id="265" r:id="rId16"/>
     <p:sldId id="266" r:id="rId17"/>
     <p:sldId id="267" r:id="rId18"/>
+    <p:sldId id="268" r:id="rId19"/>
+    <p:sldId id="269" r:id="rId20"/>
+    <p:sldId id="270" r:id="rId21"/>
   </p:sldIdLst>
   <p:sldSz cx="9144000" cy="6858000" type="screen4x3"/>
   <p:notesSz cx="6858000" cy="9144000"/>
@@ -3198,7 +3201,7 @@
                   <a:srgbClr val="0B3D2E"/>
                 </a:solidFill>
               </a:rPr>
-              <a:t>⚠️ Errores comunes</a:t>
+              <a:t>✍️ Ejercicios</a:t>
             </a:r>
           </a:p>
         </p:txBody>
@@ -3236,67 +3239,82 @@
                   <a:srgbClr val="22282E"/>
                 </a:solidFill>
               </a:rPr>
-              <a:t>•  Binario stripped sin símbolos — Normal en malware; trabaja por strings y xrefs en Ghidra</a:t>
-            </a:r>
-          </a:p>
-          <a:p>
-            <a:pPr>
-              <a:spcAft>
-                <a:spcPts val="600"/>
-              </a:spcAft>
-            </a:pPr>
-            <a:r>
-              <a:rPr sz="1500">
-                <a:solidFill>
-                  <a:srgbClr val="22282E"/>
-                </a:solidFill>
-              </a:rPr>
-              <a:t>•  strace no muestra red — Filtra por trace=network; puede usar syscalls directas</a:t>
-            </a:r>
-          </a:p>
-          <a:p>
-            <a:pPr>
-              <a:spcAft>
-                <a:spcPts val="600"/>
-              </a:spcAft>
-            </a:pPr>
-            <a:r>
-              <a:rPr sz="1500">
-                <a:solidFill>
-                  <a:srgbClr val="22282E"/>
-                </a:solidFill>
-              </a:rPr>
-              <a:t>•  Arquitectura no coincide — ELF de MIPS/ARM (IoT); usa qemu-user para emular</a:t>
-            </a:r>
-          </a:p>
-          <a:p>
-            <a:pPr>
-              <a:spcAft>
-                <a:spcPts val="600"/>
-              </a:spcAft>
-            </a:pPr>
-            <a:r>
-              <a:rPr sz="1500">
-                <a:solidFill>
-                  <a:srgbClr val="22282E"/>
-                </a:solidFill>
-              </a:rPr>
-              <a:t>•  Persistencia no encontrada — Revisa systemd, cron, rc.local y perfiles, no solo uno</a:t>
-            </a:r>
-          </a:p>
-          <a:p>
-            <a:pPr>
-              <a:spcAft>
-                <a:spcPts val="600"/>
-              </a:spcAft>
-            </a:pPr>
-            <a:r>
-              <a:rPr sz="1500">
-                <a:solidFill>
-                  <a:srgbClr val="22282E"/>
-                </a:solidFill>
-              </a:rPr>
-              <a:t>•  Módulo kernel oculto — LKM rootkit; compara lsmod con /proc/modules</a:t>
+              <a:t>•  Compara ELF y PE en estructura y herramientas de análisis.</a:t>
+            </a:r>
+          </a:p>
+          <a:p>
+            <a:pPr>
+              <a:spcAft>
+                <a:spcPts val="600"/>
+              </a:spcAft>
+            </a:pPr>
+            <a:r>
+              <a:rPr sz="1500">
+                <a:solidFill>
+                  <a:srgbClr val="22282E"/>
+                </a:solidFill>
+              </a:rPr>
+              <a:t>•  Explica cómo LDPRELOAD permite ocultar procesos a ps.</a:t>
+            </a:r>
+          </a:p>
+          <a:p>
+            <a:pPr>
+              <a:spcAft>
+                <a:spcPts val="600"/>
+              </a:spcAft>
+            </a:pPr>
+            <a:r>
+              <a:rPr sz="1500">
+                <a:solidFill>
+                  <a:srgbClr val="22282E"/>
+                </a:solidFill>
+              </a:rPr>
+              <a:t>•  Identifica 4 mecanismos de persistencia en Linux con ejemplo.</a:t>
+            </a:r>
+          </a:p>
+          <a:p>
+            <a:pPr>
+              <a:spcAft>
+                <a:spcPts val="600"/>
+              </a:spcAft>
+            </a:pPr>
+            <a:r>
+              <a:rPr sz="1500">
+                <a:solidFill>
+                  <a:srgbClr val="22282E"/>
+                </a:solidFill>
+              </a:rPr>
+              <a:t>•  Interpreta una traza de strace y describe el comportamiento.</a:t>
+            </a:r>
+          </a:p>
+          <a:p>
+            <a:pPr>
+              <a:spcAft>
+                <a:spcPts val="600"/>
+              </a:spcAft>
+            </a:pPr>
+            <a:r>
+              <a:rPr sz="1500">
+                <a:solidFill>
+                  <a:srgbClr val="22282E"/>
+                </a:solidFill>
+              </a:rPr>
+              <a:t>•  Reconoce el patrón de escaneo de una botnet tipo Mirai.</a:t>
+            </a:r>
+          </a:p>
+          <a:p>
+            <a:pPr>
+              <a:spcAft>
+                <a:spcPts val="600"/>
+              </a:spcAft>
+            </a:pPr>
+            <a:r>
+              <a:rPr sz="1500">
+                <a:solidFill>
+                  <a:srgbClr val="22282E"/>
+                </a:solidFill>
+              </a:rPr>
+              <a:t>•  Detecta un cryptominer por su uso de CPU y conexiones a pools.</a:t>
             </a:r>
           </a:p>
         </p:txBody>
@@ -3347,7 +3365,7 @@
                   <a:srgbClr val="0B3D2E"/>
                 </a:solidFill>
               </a:rPr>
-              <a:t>❓ Preguntas frecuentes</a:t>
+              <a:t>📝 Reto verificable</a:t>
             </a:r>
           </a:p>
         </p:txBody>
@@ -3385,37 +3403,22 @@
                   <a:srgbClr val="22282E"/>
                 </a:solidFill>
               </a:rPr>
-              <a:t>•  ❓ ¿El malware Linux es menos peligroso? No. Domina en servidores, IoT y cloud; botnets, ransomware Linux y mineros son muy activos.</a:t>
-            </a:r>
-          </a:p>
-          <a:p>
-            <a:pPr>
-              <a:spcAft>
-                <a:spcPts val="600"/>
-              </a:spcAft>
-            </a:pPr>
-            <a:r>
-              <a:rPr sz="1500">
-                <a:solidFill>
-                  <a:srgbClr val="22282E"/>
-                </a:solidFill>
-              </a:rPr>
-              <a:t>•  ❓ ¿Cómo analizo binarios ARM/MIPS de IoT? Con qemu-user para ejecutarlos en tu host x86 dentro del lab, y Ghidra que soporta esas arquitecturas.</a:t>
-            </a:r>
-          </a:p>
-          <a:p>
-            <a:pPr>
-              <a:spcAft>
-                <a:spcPts val="600"/>
-              </a:spcAft>
-            </a:pPr>
-            <a:r>
-              <a:rPr sz="1500">
-                <a:solidFill>
-                  <a:srgbClr val="22282E"/>
-                </a:solidFill>
-              </a:rPr>
-              <a:t>•  ❓ ¿strace es suficiente? Es un gran triaje dinámico, pero combínalo con análisis estático; el malware puede detectar el tracing o usar syscalls poco comunes.</a:t>
+              <a:t>•  Analiza una muestra ELF y entrega un informe con: arquitectura y tipo de binario, persistencia establecida, comportamiento de red (IOCs) y clasificación de familia, respaldado por salidas de readelf…</a:t>
+            </a:r>
+          </a:p>
+          <a:p>
+            <a:pPr>
+              <a:spcAft>
+                <a:spcPts val="600"/>
+              </a:spcAft>
+            </a:pPr>
+            <a:r>
+              <a:rPr sz="1500">
+                <a:solidFill>
+                  <a:srgbClr val="22282E"/>
+                </a:solidFill>
+              </a:rPr>
+              <a:t>•  Criterio de aceptación: identificas correctamente el mecanismo de persistencia con evidencia de strace/sistema de archivos y al menos un IOC de red, y clasificas la muestra (botnet/miner/backdoor)…</a:t>
             </a:r>
           </a:p>
         </p:txBody>
@@ -3466,7 +3469,7 @@
                   <a:srgbClr val="0B3D2E"/>
                 </a:solidFill>
               </a:rPr>
-              <a:t>🔗 Referencias</a:t>
+              <a:t>⚠️ Errores comunes</a:t>
             </a:r>
           </a:p>
         </p:txBody>
@@ -3504,6 +3507,274 @@
                   <a:srgbClr val="22282E"/>
                 </a:solidFill>
               </a:rPr>
+              <a:t>•  Binario stripped sin símbolos — Normal en malware; trabaja por strings y xrefs en Ghidra</a:t>
+            </a:r>
+          </a:p>
+          <a:p>
+            <a:pPr>
+              <a:spcAft>
+                <a:spcPts val="600"/>
+              </a:spcAft>
+            </a:pPr>
+            <a:r>
+              <a:rPr sz="1500">
+                <a:solidFill>
+                  <a:srgbClr val="22282E"/>
+                </a:solidFill>
+              </a:rPr>
+              <a:t>•  strace no muestra red — Filtra por trace=network; puede usar syscalls directas</a:t>
+            </a:r>
+          </a:p>
+          <a:p>
+            <a:pPr>
+              <a:spcAft>
+                <a:spcPts val="600"/>
+              </a:spcAft>
+            </a:pPr>
+            <a:r>
+              <a:rPr sz="1500">
+                <a:solidFill>
+                  <a:srgbClr val="22282E"/>
+                </a:solidFill>
+              </a:rPr>
+              <a:t>•  Arquitectura no coincide — ELF de MIPS/ARM (IoT); usa qemu-user para emular</a:t>
+            </a:r>
+          </a:p>
+          <a:p>
+            <a:pPr>
+              <a:spcAft>
+                <a:spcPts val="600"/>
+              </a:spcAft>
+            </a:pPr>
+            <a:r>
+              <a:rPr sz="1500">
+                <a:solidFill>
+                  <a:srgbClr val="22282E"/>
+                </a:solidFill>
+              </a:rPr>
+              <a:t>•  Persistencia no encontrada — Revisa systemd, cron, rc.local y perfiles, no solo uno</a:t>
+            </a:r>
+          </a:p>
+          <a:p>
+            <a:pPr>
+              <a:spcAft>
+                <a:spcPts val="600"/>
+              </a:spcAft>
+            </a:pPr>
+            <a:r>
+              <a:rPr sz="1500">
+                <a:solidFill>
+                  <a:srgbClr val="22282E"/>
+                </a:solidFill>
+              </a:rPr>
+              <a:t>•  Módulo kernel oculto — LKM rootkit; compara lsmod con /proc/modules</a:t>
+            </a:r>
+          </a:p>
+        </p:txBody>
+      </p:sp>
+    </p:spTree>
+  </p:cSld>
+  <p:clrMapOvr>
+    <a:masterClrMapping/>
+  </p:clrMapOvr>
+</p:sld>
+</file>
+
+<file path=ppt/slides/slide13.xml><?xml version="1.0" encoding="utf-8"?>
+<p:sld xmlns:a="http://schemas.openxmlformats.org/drawingml/2006/main" xmlns:p="http://schemas.openxmlformats.org/presentationml/2006/main" xmlns:r="http://schemas.openxmlformats.org/officeDocument/2006/relationships">
+  <p:cSld>
+    <p:spTree>
+      <p:nvGrpSpPr>
+        <p:cNvPr id="1" name=""/>
+        <p:cNvGrpSpPr/>
+        <p:nvPr/>
+      </p:nvGrpSpPr>
+      <p:grpSpPr/>
+      <p:sp>
+        <p:nvSpPr>
+          <p:cNvPr id="2" name="TextBox 1"/>
+          <p:cNvSpPr txBox="1"/>
+          <p:nvPr/>
+        </p:nvSpPr>
+        <p:spPr>
+          <a:xfrm>
+            <a:off x="457200" y="320040"/>
+            <a:ext cx="8229600" cy="822960"/>
+          </a:xfrm>
+          <a:prstGeom prst="rect">
+            <a:avLst/>
+          </a:prstGeom>
+          <a:noFill/>
+        </p:spPr>
+        <p:txBody>
+          <a:bodyPr wrap="square">
+            <a:spAutoFit/>
+          </a:bodyPr>
+          <a:lstStyle/>
+          <a:p>
+            <a:r>
+              <a:rPr sz="2600" b="1">
+                <a:solidFill>
+                  <a:srgbClr val="0B3D2E"/>
+                </a:solidFill>
+              </a:rPr>
+              <a:t>❓ Preguntas frecuentes</a:t>
+            </a:r>
+          </a:p>
+        </p:txBody>
+      </p:sp>
+      <p:sp>
+        <p:nvSpPr>
+          <p:cNvPr id="3" name="TextBox 2"/>
+          <p:cNvSpPr txBox="1"/>
+          <p:nvPr/>
+        </p:nvSpPr>
+        <p:spPr>
+          <a:xfrm>
+            <a:off x="457200" y="1280160"/>
+            <a:ext cx="8229600" cy="4937760"/>
+          </a:xfrm>
+          <a:prstGeom prst="rect">
+            <a:avLst/>
+          </a:prstGeom>
+          <a:noFill/>
+        </p:spPr>
+        <p:txBody>
+          <a:bodyPr wrap="square">
+            <a:spAutoFit/>
+          </a:bodyPr>
+          <a:lstStyle/>
+          <a:p>
+            <a:pPr>
+              <a:spcAft>
+                <a:spcPts val="600"/>
+              </a:spcAft>
+            </a:pPr>
+            <a:r>
+              <a:rPr sz="1500">
+                <a:solidFill>
+                  <a:srgbClr val="22282E"/>
+                </a:solidFill>
+              </a:rPr>
+              <a:t>•  ❓ ¿El malware Linux es menos peligroso? No. Domina en servidores, IoT y cloud; botnets, ransomware Linux y mineros son muy activos.</a:t>
+            </a:r>
+          </a:p>
+          <a:p>
+            <a:pPr>
+              <a:spcAft>
+                <a:spcPts val="600"/>
+              </a:spcAft>
+            </a:pPr>
+            <a:r>
+              <a:rPr sz="1500">
+                <a:solidFill>
+                  <a:srgbClr val="22282E"/>
+                </a:solidFill>
+              </a:rPr>
+              <a:t>•  ❓ ¿Cómo analizo binarios ARM/MIPS de IoT? Con qemu-user para ejecutarlos en tu host x86 dentro del lab, y Ghidra que soporta esas arquitecturas.</a:t>
+            </a:r>
+          </a:p>
+          <a:p>
+            <a:pPr>
+              <a:spcAft>
+                <a:spcPts val="600"/>
+              </a:spcAft>
+            </a:pPr>
+            <a:r>
+              <a:rPr sz="1500">
+                <a:solidFill>
+                  <a:srgbClr val="22282E"/>
+                </a:solidFill>
+              </a:rPr>
+              <a:t>•  ❓ ¿strace es suficiente? Es un gran triaje dinámico, pero combínalo con análisis estático; el malware puede detectar el tracing o usar syscalls poco comunes.</a:t>
+            </a:r>
+          </a:p>
+        </p:txBody>
+      </p:sp>
+    </p:spTree>
+  </p:cSld>
+  <p:clrMapOvr>
+    <a:masterClrMapping/>
+  </p:clrMapOvr>
+</p:sld>
+</file>
+
+<file path=ppt/slides/slide14.xml><?xml version="1.0" encoding="utf-8"?>
+<p:sld xmlns:a="http://schemas.openxmlformats.org/drawingml/2006/main" xmlns:p="http://schemas.openxmlformats.org/presentationml/2006/main" xmlns:r="http://schemas.openxmlformats.org/officeDocument/2006/relationships">
+  <p:cSld>
+    <p:spTree>
+      <p:nvGrpSpPr>
+        <p:cNvPr id="1" name=""/>
+        <p:cNvGrpSpPr/>
+        <p:nvPr/>
+      </p:nvGrpSpPr>
+      <p:grpSpPr/>
+      <p:sp>
+        <p:nvSpPr>
+          <p:cNvPr id="2" name="TextBox 1"/>
+          <p:cNvSpPr txBox="1"/>
+          <p:nvPr/>
+        </p:nvSpPr>
+        <p:spPr>
+          <a:xfrm>
+            <a:off x="457200" y="320040"/>
+            <a:ext cx="8229600" cy="822960"/>
+          </a:xfrm>
+          <a:prstGeom prst="rect">
+            <a:avLst/>
+          </a:prstGeom>
+          <a:noFill/>
+        </p:spPr>
+        <p:txBody>
+          <a:bodyPr wrap="square">
+            <a:spAutoFit/>
+          </a:bodyPr>
+          <a:lstStyle/>
+          <a:p>
+            <a:r>
+              <a:rPr sz="2600" b="1">
+                <a:solidFill>
+                  <a:srgbClr val="0B3D2E"/>
+                </a:solidFill>
+              </a:rPr>
+              <a:t>🔗 Referencias</a:t>
+            </a:r>
+          </a:p>
+        </p:txBody>
+      </p:sp>
+      <p:sp>
+        <p:nvSpPr>
+          <p:cNvPr id="3" name="TextBox 2"/>
+          <p:cNvSpPr txBox="1"/>
+          <p:nvPr/>
+        </p:nvSpPr>
+        <p:spPr>
+          <a:xfrm>
+            <a:off x="457200" y="1280160"/>
+            <a:ext cx="8229600" cy="4937760"/>
+          </a:xfrm>
+          <a:prstGeom prst="rect">
+            <a:avLst/>
+          </a:prstGeom>
+          <a:noFill/>
+        </p:spPr>
+        <p:txBody>
+          <a:bodyPr wrap="square">
+            <a:spAutoFit/>
+          </a:bodyPr>
+          <a:lstStyle/>
+          <a:p>
+            <a:pPr>
+              <a:spcAft>
+                <a:spcPts val="600"/>
+              </a:spcAft>
+            </a:pPr>
+            <a:r>
+              <a:rPr sz="1500">
+                <a:solidFill>
+                  <a:srgbClr val="22282E"/>
+                </a:solidFill>
+              </a:rPr>
               <a:t>•  Monnappa K. A., Learning Malware Analysis.</a:t>
             </a:r>
           </a:p>
@@ -3554,6 +3825,81 @@
           </a:p>
         </p:txBody>
       </p:sp>
+    </p:spTree>
+  </p:cSld>
+  <p:clrMapOvr>
+    <a:masterClrMapping/>
+  </p:clrMapOvr>
+</p:sld>
+</file>
+
+<file path=ppt/slides/slide15.xml><?xml version="1.0" encoding="utf-8"?>
+<p:sld xmlns:a="http://schemas.openxmlformats.org/drawingml/2006/main" xmlns:p="http://schemas.openxmlformats.org/presentationml/2006/main" xmlns:r="http://schemas.openxmlformats.org/officeDocument/2006/relationships">
+  <p:cSld>
+    <p:spTree>
+      <p:nvGrpSpPr>
+        <p:cNvPr id="1" name=""/>
+        <p:cNvGrpSpPr/>
+        <p:nvPr/>
+      </p:nvGrpSpPr>
+      <p:grpSpPr/>
+      <p:sp>
+        <p:nvSpPr>
+          <p:cNvPr id="2" name="TextBox 1"/>
+          <p:cNvSpPr txBox="1"/>
+          <p:nvPr/>
+        </p:nvSpPr>
+        <p:spPr>
+          <a:xfrm>
+            <a:off x="457200" y="274320"/>
+            <a:ext cx="8229600" cy="640080"/>
+          </a:xfrm>
+          <a:prstGeom prst="rect">
+            <a:avLst/>
+          </a:prstGeom>
+          <a:noFill/>
+        </p:spPr>
+        <p:txBody>
+          <a:bodyPr wrap="square">
+            <a:spAutoFit/>
+          </a:bodyPr>
+          <a:lstStyle/>
+          <a:p>
+            <a:r>
+              <a:rPr sz="2200" b="1">
+                <a:solidFill>
+                  <a:srgbClr val="0B3D2E"/>
+                </a:solidFill>
+              </a:rPr>
+              <a:t>Diagrama de la clase</a:t>
+            </a:r>
+          </a:p>
+        </p:txBody>
+      </p:sp>
+      <p:pic>
+        <p:nvPicPr>
+          <p:cNvPr id="3" name="Picture 2" descr="527ff2edc8598e3f.png"/>
+          <p:cNvPicPr>
+            <a:picLocks noChangeAspect="1"/>
+          </p:cNvPicPr>
+          <p:nvPr/>
+        </p:nvPicPr>
+        <p:blipFill>
+          <a:blip r:embed="rId2"/>
+          <a:stretch>
+            <a:fillRect/>
+          </a:stretch>
+        </p:blipFill>
+        <p:spPr>
+          <a:xfrm>
+            <a:off x="457200" y="2295144"/>
+            <a:ext cx="8229600" cy="2907792"/>
+          </a:xfrm>
+          <a:prstGeom prst="rect">
+            <a:avLst/>
+          </a:prstGeom>
+        </p:spPr>
+      </p:pic>
     </p:spTree>
   </p:cSld>
   <p:clrMapOvr>
@@ -3638,7 +3984,7 @@
                   <a:srgbClr val="22282E"/>
                 </a:solidFill>
               </a:rPr>
-              <a:t>•  Adaptar el análisis al ecosistema Linux, cada vez más atacado por su presencia en servidores, IoT y contenedores. El alumno estudiará el formato ELF, las técnicas de persistencia y ocultación en Linux (cron, systemd, LDPRELOAD, rootkits LKM), las familias típicas (botnets IoT, mineros, backdoors) y las herramientas de análisis estático y dinámico en este entorno.</a:t>
+              <a:t>•  Adaptar el análisis al ecosistema Linux, cada vez más atacado por su presencia en servidores, IoT y contenedores. El alumno estudiará el formato ELF, las técnicas de persistencia y ocultación en…</a:t>
             </a:r>
           </a:p>
         </p:txBody>
@@ -4032,7 +4378,7 @@
                   <a:srgbClr val="0B3D2E"/>
                 </a:solidFill>
               </a:rPr>
-              <a:t>📖 Definiciones y características</a:t>
+              <a:t>🧠 Explicación en profundidad</a:t>
             </a:r>
           </a:p>
         </p:txBody>
@@ -4070,67 +4416,97 @@
                   <a:srgbClr val="22282E"/>
                 </a:solidFill>
               </a:rPr>
-              <a:t>•  ELF: formato de ejecutables/librerías de Linux. Característica clave: secciones y segmentos (headers de programa).</a:t>
-            </a:r>
-          </a:p>
-          <a:p>
-            <a:pPr>
-              <a:spcAft>
-                <a:spcPts val="600"/>
-              </a:spcAft>
-            </a:pPr>
-            <a:r>
-              <a:rPr sz="1500">
-                <a:solidFill>
-                  <a:srgbClr val="22282E"/>
-                </a:solidFill>
-              </a:rPr>
-              <a:t>•  LDPRELOAD: variable para precargar librerías. Característica clave: hooking de funciones libc sin tocar el binario.</a:t>
-            </a:r>
-          </a:p>
-          <a:p>
-            <a:pPr>
-              <a:spcAft>
-                <a:spcPts val="600"/>
-              </a:spcAft>
-            </a:pPr>
-            <a:r>
-              <a:rPr sz="1500">
-                <a:solidFill>
-                  <a:srgbClr val="22282E"/>
-                </a:solidFill>
-              </a:rPr>
-              <a:t>•  LKM rootkit: módulo del kernel malicioso. Característica clave: ocultación a nivel kernel.</a:t>
-            </a:r>
-          </a:p>
-          <a:p>
-            <a:pPr>
-              <a:spcAft>
-                <a:spcPts val="600"/>
-              </a:spcAft>
-            </a:pPr>
-            <a:r>
-              <a:rPr sz="1500">
-                <a:solidFill>
-                  <a:srgbClr val="22282E"/>
-                </a:solidFill>
-              </a:rPr>
-              <a:t>•  strace/ltrace: trazan syscalls / llamadas a librería. Característica clave: comportamiento en vivo.</a:t>
-            </a:r>
-          </a:p>
-          <a:p>
-            <a:pPr>
-              <a:spcAft>
-                <a:spcPts val="600"/>
-              </a:spcAft>
-            </a:pPr>
-            <a:r>
-              <a:rPr sz="1500">
-                <a:solidFill>
-                  <a:srgbClr val="22282E"/>
-                </a:solidFill>
-              </a:rPr>
-              <a:t>•  Mirai: botnet IoT por credenciales por defecto. Característica clave: escaneo y fuerza bruta Telnet/SSH.</a:t>
+              <a:t>•  Aunque Windows domina el malware de escritorio, Linux es el objetivo dominante donde de verdad</a:t>
+            </a:r>
+          </a:p>
+          <a:p>
+            <a:pPr>
+              <a:spcAft>
+                <a:spcPts val="600"/>
+              </a:spcAft>
+            </a:pPr>
+            <a:r>
+              <a:rPr sz="1500">
+                <a:solidFill>
+                  <a:srgbClr val="22282E"/>
+                </a:solidFill>
+              </a:rPr>
+              <a:t>•  importa: los servidores (web, bases de datos, la nube) y los dispositivos IoT corren Linux, y</a:t>
+            </a:r>
+          </a:p>
+          <a:p>
+            <a:pPr>
+              <a:spcAft>
+                <a:spcPts val="600"/>
+              </a:spcAft>
+            </a:pPr>
+            <a:r>
+              <a:rPr sz="1500">
+                <a:solidFill>
+                  <a:srgbClr val="22282E"/>
+                </a:solidFill>
+              </a:rPr>
+              <a:t>•  son blancos de altísimo valor. El malware de Linux tiene características propias que exigen un</a:t>
+            </a:r>
+          </a:p>
+          <a:p>
+            <a:pPr>
+              <a:spcAft>
+                <a:spcPts val="600"/>
+              </a:spcAft>
+            </a:pPr>
+            <a:r>
+              <a:rPr sz="1500">
+                <a:solidFill>
+                  <a:srgbClr val="22282E"/>
+                </a:solidFill>
+              </a:rPr>
+              <a:t>•  instrumental adaptado: usa el formato ELF en lugar de PE, se apoya en mecanismos de Linux para</a:t>
+            </a:r>
+          </a:p>
+          <a:p>
+            <a:pPr>
+              <a:spcAft>
+                <a:spcPts val="600"/>
+              </a:spcAft>
+            </a:pPr>
+            <a:r>
+              <a:rPr sz="1500">
+                <a:solidFill>
+                  <a:srgbClr val="22282E"/>
+                </a:solidFill>
+              </a:rPr>
+              <a:t>•  persistir y ocultarse, y abarca desde sofisticados backdoors de servidor hasta las gigantescas botnets</a:t>
+            </a:r>
+          </a:p>
+          <a:p>
+            <a:pPr>
+              <a:spcAft>
+                <a:spcPts val="600"/>
+              </a:spcAft>
+            </a:pPr>
+            <a:r>
+              <a:rPr sz="1500">
+                <a:solidFill>
+                  <a:srgbClr val="22282E"/>
+                </a:solidFill>
+              </a:rPr>
+              <a:t>•  de IoT. Analizarlo aplica los principios de la parte con las particularidades del ecosistema Linux.</a:t>
+            </a:r>
+          </a:p>
+          <a:p>
+            <a:pPr>
+              <a:spcAft>
+                <a:spcPts val="600"/>
+              </a:spcAft>
+            </a:pPr>
+            <a:r>
+              <a:rPr sz="1500">
+                <a:solidFill>
+                  <a:srgbClr val="22282E"/>
+                </a:solidFill>
+              </a:rPr>
+              <a:t>•  El formato ELF (Clase 130) es el punto de partida: se analiza con las mismas</a:t>
             </a:r>
           </a:p>
         </p:txBody>
@@ -4181,7 +4557,7 @@
                   <a:srgbClr val="0B3D2E"/>
                 </a:solidFill>
               </a:rPr>
-              <a:t>🧰 Herramientas y preparación</a:t>
+              <a:t>📖 Definiciones y características</a:t>
             </a:r>
           </a:p>
         </p:txBody>
@@ -4219,52 +4595,67 @@
                   <a:srgbClr val="22282E"/>
                 </a:solidFill>
               </a:rPr>
-              <a:t>•  readelf, objdump, nm, file para ELF estático.</a:t>
-            </a:r>
-          </a:p>
-          <a:p>
-            <a:pPr>
-              <a:spcAft>
-                <a:spcPts val="600"/>
-              </a:spcAft>
-            </a:pPr>
-            <a:r>
-              <a:rPr sz="1500">
-                <a:solidFill>
-                  <a:srgbClr val="22282E"/>
-                </a:solidFill>
-              </a:rPr>
-              <a:t>•  Ghidra para desensamblado ELF.</a:t>
-            </a:r>
-          </a:p>
-          <a:p>
-            <a:pPr>
-              <a:spcAft>
-                <a:spcPts val="600"/>
-              </a:spcAft>
-            </a:pPr>
-            <a:r>
-              <a:rPr sz="1500">
-                <a:solidFill>
-                  <a:srgbClr val="22282E"/>
-                </a:solidFill>
-              </a:rPr>
-              <a:t>•  strace, ltrace, /proc, tcpdump/Wireshark para dinámico.</a:t>
-            </a:r>
-          </a:p>
-          <a:p>
-            <a:pPr>
-              <a:spcAft>
-                <a:spcPts val="600"/>
-              </a:spcAft>
-            </a:pPr>
-            <a:r>
-              <a:rPr sz="1500">
-                <a:solidFill>
-                  <a:srgbClr val="22282E"/>
-                </a:solidFill>
-              </a:rPr>
-              <a:t>•  VM Linux aislada (REMnux o Ubuntu mínima) con snapshot.</a:t>
+              <a:t>•  ELF: formato de ejecutables/librerías de Linux. Característica clave: secciones y segmentos (headers de programa).</a:t>
+            </a:r>
+          </a:p>
+          <a:p>
+            <a:pPr>
+              <a:spcAft>
+                <a:spcPts val="600"/>
+              </a:spcAft>
+            </a:pPr>
+            <a:r>
+              <a:rPr sz="1500">
+                <a:solidFill>
+                  <a:srgbClr val="22282E"/>
+                </a:solidFill>
+              </a:rPr>
+              <a:t>•  LDPRELOAD: variable para precargar librerías. Característica clave: hooking de funciones libc sin tocar el binario.</a:t>
+            </a:r>
+          </a:p>
+          <a:p>
+            <a:pPr>
+              <a:spcAft>
+                <a:spcPts val="600"/>
+              </a:spcAft>
+            </a:pPr>
+            <a:r>
+              <a:rPr sz="1500">
+                <a:solidFill>
+                  <a:srgbClr val="22282E"/>
+                </a:solidFill>
+              </a:rPr>
+              <a:t>•  LKM rootkit: módulo del kernel malicioso. Característica clave: ocultación a nivel kernel.</a:t>
+            </a:r>
+          </a:p>
+          <a:p>
+            <a:pPr>
+              <a:spcAft>
+                <a:spcPts val="600"/>
+              </a:spcAft>
+            </a:pPr>
+            <a:r>
+              <a:rPr sz="1500">
+                <a:solidFill>
+                  <a:srgbClr val="22282E"/>
+                </a:solidFill>
+              </a:rPr>
+              <a:t>•  strace/ltrace: trazan syscalls / llamadas a librería. Característica clave: comportamiento en vivo.</a:t>
+            </a:r>
+          </a:p>
+          <a:p>
+            <a:pPr>
+              <a:spcAft>
+                <a:spcPts val="600"/>
+              </a:spcAft>
+            </a:pPr>
+            <a:r>
+              <a:rPr sz="1500">
+                <a:solidFill>
+                  <a:srgbClr val="22282E"/>
+                </a:solidFill>
+              </a:rPr>
+              <a:t>•  Mirai: botnet IoT por credenciales por defecto. Característica clave: escaneo y fuerza bruta Telnet/SSH.</a:t>
             </a:r>
           </a:p>
         </p:txBody>
@@ -4315,7 +4706,7 @@
                   <a:srgbClr val="0B3D2E"/>
                 </a:solidFill>
               </a:rPr>
-              <a:t>🧪 Laboratorio guiado</a:t>
+              <a:t>📔 Glosario</a:t>
             </a:r>
           </a:p>
         </p:txBody>
@@ -4353,97 +4744,97 @@
                   <a:srgbClr val="22282E"/>
                 </a:solidFill>
               </a:rPr>
-              <a:t>•  Triaje estático: file muestra, readelf -h muestra (arquitectura, tipo), readelf -d (dependencias dinámicas) y nm -D (símbolos). ¿Está stripped?, ¿estático o dinámico?</a:t>
-            </a:r>
-          </a:p>
-          <a:p>
-            <a:pPr>
-              <a:spcAft>
-                <a:spcPts val="600"/>
-              </a:spcAft>
-            </a:pPr>
-            <a:r>
-              <a:rPr sz="1500">
-                <a:solidFill>
-                  <a:srgbClr val="22282E"/>
-                </a:solidFill>
-              </a:rPr>
-              <a:t>•  Extrae strings y busca rutas de persistencia (/etc/cron., /etc/systemd/system, ~/.bashrc), IPs y comandos.</a:t>
-            </a:r>
-          </a:p>
-          <a:p>
-            <a:pPr>
-              <a:spcAft>
-                <a:spcPts val="600"/>
-              </a:spcAft>
-            </a:pPr>
-            <a:r>
-              <a:rPr sz="1500">
-                <a:solidFill>
-                  <a:srgbClr val="22282E"/>
-                </a:solidFill>
-              </a:rPr>
-              <a:t>•  Desensambla en Ghidra la función principal y localiza el bucle de escaneo/beacon si es una botnet.</a:t>
-            </a:r>
-          </a:p>
-          <a:p>
-            <a:pPr>
-              <a:spcAft>
-                <a:spcPts val="600"/>
-              </a:spcAft>
-            </a:pPr>
-            <a:r>
-              <a:rPr sz="1500">
-                <a:solidFill>
-                  <a:srgbClr val="22282E"/>
-                </a:solidFill>
-              </a:rPr>
-              <a:t>•  Análisis dinámico: en la VM aislada, strace -f -e trace=network,process ./muestra para ver conexiones y procesos hijos; ltrace para llamadas libc.</a:t>
-            </a:r>
-          </a:p>
-          <a:p>
-            <a:pPr>
-              <a:spcAft>
-                <a:spcPts val="600"/>
-              </a:spcAft>
-            </a:pPr>
-            <a:r>
-              <a:rPr sz="1500">
-                <a:solidFill>
-                  <a:srgbClr val="22282E"/>
-                </a:solidFill>
-              </a:rPr>
-              <a:t>•  Observa la persistencia creada: nuevas unidades systemd, entradas de cron o modificaciones de perfiles de shell. Documéntalas.</a:t>
-            </a:r>
-          </a:p>
-          <a:p>
-            <a:pPr>
-              <a:spcAft>
-                <a:spcPts val="600"/>
-              </a:spcAft>
-            </a:pPr>
-            <a:r>
-              <a:rPr sz="1500">
-                <a:solidFill>
-                  <a:srgbClr val="22282E"/>
-                </a:solidFill>
-              </a:rPr>
-              <a:t>•  Si sospechas LDPRELOAD, revisa /etc/ld.so.preload y librerías inyectadas; para LKM, revisa lsmod y módulos ocultos.</a:t>
-            </a:r>
-          </a:p>
-          <a:p>
-            <a:pPr>
-              <a:spcAft>
-                <a:spcPts val="600"/>
-              </a:spcAft>
-            </a:pPr>
-            <a:r>
-              <a:rPr sz="1500">
-                <a:solidFill>
-                  <a:srgbClr val="22282E"/>
-                </a:solidFill>
-              </a:rPr>
-              <a:t>•  Captura el tráfico con tcpdump y extrae IOCs de red; mapea a ATT&amp;CK. Restaura snapshot.</a:t>
+              <a:t>•  Término — Definición concisa</a:t>
+            </a:r>
+          </a:p>
+          <a:p>
+            <a:pPr>
+              <a:spcAft>
+                <a:spcPts val="600"/>
+              </a:spcAft>
+            </a:pPr>
+            <a:r>
+              <a:rPr sz="1500">
+                <a:solidFill>
+                  <a:srgbClr val="22282E"/>
+                </a:solidFill>
+              </a:rPr>
+              <a:t>•  Malware de Linux — Malware dirigido a servidores e IoT</a:t>
+            </a:r>
+          </a:p>
+          <a:p>
+            <a:pPr>
+              <a:spcAft>
+                <a:spcPts val="600"/>
+              </a:spcAft>
+            </a:pPr>
+            <a:r>
+              <a:rPr sz="1500">
+                <a:solidFill>
+                  <a:srgbClr val="22282E"/>
+                </a:solidFill>
+              </a:rPr>
+              <a:t>•  ELF — Formato de ejecutable de Linux</a:t>
+            </a:r>
+          </a:p>
+          <a:p>
+            <a:pPr>
+              <a:spcAft>
+                <a:spcPts val="600"/>
+              </a:spcAft>
+            </a:pPr>
+            <a:r>
+              <a:rPr sz="1500">
+                <a:solidFill>
+                  <a:srgbClr val="22282E"/>
+                </a:solidFill>
+              </a:rPr>
+              <a:t>•  strace / ltrace — Observan syscalls y funciones de librería</a:t>
+            </a:r>
+          </a:p>
+          <a:p>
+            <a:pPr>
+              <a:spcAft>
+                <a:spcPts val="600"/>
+              </a:spcAft>
+            </a:pPr>
+            <a:r>
+              <a:rPr sz="1500">
+                <a:solidFill>
+                  <a:srgbClr val="22282E"/>
+                </a:solidFill>
+              </a:rPr>
+              <a:t>•  LDPRELOAD — Carga una librería antes que las demás; secuestra libc</a:t>
+            </a:r>
+          </a:p>
+          <a:p>
+            <a:pPr>
+              <a:spcAft>
+                <a:spcPts val="600"/>
+              </a:spcAft>
+            </a:pPr>
+            <a:r>
+              <a:rPr sz="1500">
+                <a:solidFill>
+                  <a:srgbClr val="22282E"/>
+                </a:solidFill>
+              </a:rPr>
+              <a:t>•  API hooking en Linux — Redefinir funciones de libc para ocultar</a:t>
+            </a:r>
+          </a:p>
+          <a:p>
+            <a:pPr>
+              <a:spcAft>
+                <a:spcPts val="600"/>
+              </a:spcAft>
+            </a:pPr>
+            <a:r>
+              <a:rPr sz="1500">
+                <a:solidFill>
+                  <a:srgbClr val="22282E"/>
+                </a:solidFill>
+              </a:rPr>
+              <a:t>•  Persistencia Linux — cron, systemd, rc.local, .bashrc, SSH keys</a:t>
             </a:r>
           </a:p>
         </p:txBody>
@@ -4494,7 +4885,7 @@
                   <a:srgbClr val="0B3D2E"/>
                 </a:solidFill>
               </a:rPr>
-              <a:t>✍️ Ejercicios</a:t>
+              <a:t>🧰 Herramientas y preparación</a:t>
             </a:r>
           </a:p>
         </p:txBody>
@@ -4532,82 +4923,52 @@
                   <a:srgbClr val="22282E"/>
                 </a:solidFill>
               </a:rPr>
-              <a:t>•  Compara ELF y PE en estructura y herramientas de análisis.</a:t>
-            </a:r>
-          </a:p>
-          <a:p>
-            <a:pPr>
-              <a:spcAft>
-                <a:spcPts val="600"/>
-              </a:spcAft>
-            </a:pPr>
-            <a:r>
-              <a:rPr sz="1500">
-                <a:solidFill>
-                  <a:srgbClr val="22282E"/>
-                </a:solidFill>
-              </a:rPr>
-              <a:t>•  Explica cómo LDPRELOAD permite ocultar procesos a ps.</a:t>
-            </a:r>
-          </a:p>
-          <a:p>
-            <a:pPr>
-              <a:spcAft>
-                <a:spcPts val="600"/>
-              </a:spcAft>
-            </a:pPr>
-            <a:r>
-              <a:rPr sz="1500">
-                <a:solidFill>
-                  <a:srgbClr val="22282E"/>
-                </a:solidFill>
-              </a:rPr>
-              <a:t>•  Identifica 4 mecanismos de persistencia en Linux con ejemplo.</a:t>
-            </a:r>
-          </a:p>
-          <a:p>
-            <a:pPr>
-              <a:spcAft>
-                <a:spcPts val="600"/>
-              </a:spcAft>
-            </a:pPr>
-            <a:r>
-              <a:rPr sz="1500">
-                <a:solidFill>
-                  <a:srgbClr val="22282E"/>
-                </a:solidFill>
-              </a:rPr>
-              <a:t>•  Interpreta una traza de strace y describe el comportamiento.</a:t>
-            </a:r>
-          </a:p>
-          <a:p>
-            <a:pPr>
-              <a:spcAft>
-                <a:spcPts val="600"/>
-              </a:spcAft>
-            </a:pPr>
-            <a:r>
-              <a:rPr sz="1500">
-                <a:solidFill>
-                  <a:srgbClr val="22282E"/>
-                </a:solidFill>
-              </a:rPr>
-              <a:t>•  Reconoce el patrón de escaneo de una botnet tipo Mirai.</a:t>
-            </a:r>
-          </a:p>
-          <a:p>
-            <a:pPr>
-              <a:spcAft>
-                <a:spcPts val="600"/>
-              </a:spcAft>
-            </a:pPr>
-            <a:r>
-              <a:rPr sz="1500">
-                <a:solidFill>
-                  <a:srgbClr val="22282E"/>
-                </a:solidFill>
-              </a:rPr>
-              <a:t>•  Detecta un cryptominer por su uso de CPU y conexiones a pools.</a:t>
+              <a:t>•  readelf, objdump, nm, file para ELF estático.</a:t>
+            </a:r>
+          </a:p>
+          <a:p>
+            <a:pPr>
+              <a:spcAft>
+                <a:spcPts val="600"/>
+              </a:spcAft>
+            </a:pPr>
+            <a:r>
+              <a:rPr sz="1500">
+                <a:solidFill>
+                  <a:srgbClr val="22282E"/>
+                </a:solidFill>
+              </a:rPr>
+              <a:t>•  Ghidra para desensamblado ELF.</a:t>
+            </a:r>
+          </a:p>
+          <a:p>
+            <a:pPr>
+              <a:spcAft>
+                <a:spcPts val="600"/>
+              </a:spcAft>
+            </a:pPr>
+            <a:r>
+              <a:rPr sz="1500">
+                <a:solidFill>
+                  <a:srgbClr val="22282E"/>
+                </a:solidFill>
+              </a:rPr>
+              <a:t>•  strace, ltrace, /proc, tcpdump/Wireshark para dinámico.</a:t>
+            </a:r>
+          </a:p>
+          <a:p>
+            <a:pPr>
+              <a:spcAft>
+                <a:spcPts val="600"/>
+              </a:spcAft>
+            </a:pPr>
+            <a:r>
+              <a:rPr sz="1500">
+                <a:solidFill>
+                  <a:srgbClr val="22282E"/>
+                </a:solidFill>
+              </a:rPr>
+              <a:t>•  VM Linux aislada (REMnux o Ubuntu mínima) con snapshot.</a:t>
             </a:r>
           </a:p>
         </p:txBody>
@@ -4658,7 +5019,7 @@
                   <a:srgbClr val="0B3D2E"/>
                 </a:solidFill>
               </a:rPr>
-              <a:t>📝 Reto verificable</a:t>
+              <a:t>🧪 Laboratorio guiado</a:t>
             </a:r>
           </a:p>
         </p:txBody>
@@ -4696,22 +5057,97 @@
                   <a:srgbClr val="22282E"/>
                 </a:solidFill>
               </a:rPr>
-              <a:t>•  Analiza una muestra ELF y entrega un informe con: arquitectura y tipo de binario, persistencia establecida, comportamiento de red (IOCs) y clasificación de familia, respaldado por salidas de readelf, strace y tcpdump.</a:t>
-            </a:r>
-          </a:p>
-          <a:p>
-            <a:pPr>
-              <a:spcAft>
-                <a:spcPts val="600"/>
-              </a:spcAft>
-            </a:pPr>
-            <a:r>
-              <a:rPr sz="1500">
-                <a:solidFill>
-                  <a:srgbClr val="22282E"/>
-                </a:solidFill>
-              </a:rPr>
-              <a:t>•  Criterio de aceptación: identificas correctamente el mecanismo de persistencia con evidencia de strace/sistema de archivos y al menos un IOC de red, y clasificas la muestra (botnet/miner/backdoor) con justificación.</a:t>
+              <a:t>•  Triaje estático: file muestra, readelf -h muestra (arquitectura, tipo), readelf -d (dependencias dinámicas) y nm -D (símbolos). ¿Está stripped?, ¿estático o dinámico?</a:t>
+            </a:r>
+          </a:p>
+          <a:p>
+            <a:pPr>
+              <a:spcAft>
+                <a:spcPts val="600"/>
+              </a:spcAft>
+            </a:pPr>
+            <a:r>
+              <a:rPr sz="1500">
+                <a:solidFill>
+                  <a:srgbClr val="22282E"/>
+                </a:solidFill>
+              </a:rPr>
+              <a:t>•  Extrae strings y busca rutas de persistencia (/etc/cron., /etc/systemd/system, ~/.bashrc), IPs y comandos.</a:t>
+            </a:r>
+          </a:p>
+          <a:p>
+            <a:pPr>
+              <a:spcAft>
+                <a:spcPts val="600"/>
+              </a:spcAft>
+            </a:pPr>
+            <a:r>
+              <a:rPr sz="1500">
+                <a:solidFill>
+                  <a:srgbClr val="22282E"/>
+                </a:solidFill>
+              </a:rPr>
+              <a:t>•  Desensambla en Ghidra la función principal y localiza el bucle de escaneo/beacon si es una botnet.</a:t>
+            </a:r>
+          </a:p>
+          <a:p>
+            <a:pPr>
+              <a:spcAft>
+                <a:spcPts val="600"/>
+              </a:spcAft>
+            </a:pPr>
+            <a:r>
+              <a:rPr sz="1500">
+                <a:solidFill>
+                  <a:srgbClr val="22282E"/>
+                </a:solidFill>
+              </a:rPr>
+              <a:t>•  Análisis dinámico: en la VM aislada, strace -f -e trace=network,process ./muestra para ver conexiones y procesos hijos; ltrace para llamadas libc.</a:t>
+            </a:r>
+          </a:p>
+          <a:p>
+            <a:pPr>
+              <a:spcAft>
+                <a:spcPts val="600"/>
+              </a:spcAft>
+            </a:pPr>
+            <a:r>
+              <a:rPr sz="1500">
+                <a:solidFill>
+                  <a:srgbClr val="22282E"/>
+                </a:solidFill>
+              </a:rPr>
+              <a:t>•  Observa la persistencia creada: nuevas unidades systemd, entradas de cron o modificaciones de perfiles de shell. Documéntalas.</a:t>
+            </a:r>
+          </a:p>
+          <a:p>
+            <a:pPr>
+              <a:spcAft>
+                <a:spcPts val="600"/>
+              </a:spcAft>
+            </a:pPr>
+            <a:r>
+              <a:rPr sz="1500">
+                <a:solidFill>
+                  <a:srgbClr val="22282E"/>
+                </a:solidFill>
+              </a:rPr>
+              <a:t>•  Si sospechas LDPRELOAD, revisa /etc/ld.so.preload y librerías inyectadas; para LKM, revisa lsmod y módulos ocultos.</a:t>
+            </a:r>
+          </a:p>
+          <a:p>
+            <a:pPr>
+              <a:spcAft>
+                <a:spcPts val="600"/>
+              </a:spcAft>
+            </a:pPr>
+            <a:r>
+              <a:rPr sz="1500">
+                <a:solidFill>
+                  <a:srgbClr val="22282E"/>
+                </a:solidFill>
+              </a:rPr>
+              <a:t>•  Captura el tráfico con tcpdump y extrae IOCs de red; mapea a ATT&amp;CK. Restaura snapshot.</a:t>
             </a:r>
           </a:p>
         </p:txBody>
